--- a/deliverables/Arne_Ramos_AI_Capstone_Executive_Presentation.pptx
+++ b/deliverables/Arne_Ramos_AI_Capstone_Executive_Presentation.pptx
@@ -4351,7 +4351,7 @@
                   <a:srgbClr val="333333"/>
                 </a:solidFill>
               </a:rPr>
-              <a:t>•  Proof-of-concept result: 91% of attacks detected, with 7.14% of normal traffic flagged for review</a:t>
+              <a:t>•  Proof-of-concept result: 96% of attacks detected, with 26.74% of normal traffic flagged for review</a:t>
             </a:r>
           </a:p>
           <a:p>
@@ -4556,7 +4556,7 @@
                   <a:srgbClr val="2A2A2A"/>
                 </a:solidFill>
               </a:rPr>
-              <a:t> 91% of attacks detected on data the system had never seen, at ordinary hardware speed</a:t>
+              <a:t> 96% of attacks detected on data the system had never seen, at ordinary hardware speed</a:t>
             </a:r>
           </a:p>
           <a:p>
@@ -5715,7 +5715,7 @@
                   <a:srgbClr val="2A2A2A"/>
                 </a:solidFill>
               </a:rPr>
-              <a:t>30,737 connections the system had never seen</a:t>
+              <a:t>52,644 connections the system had never seen</a:t>
             </a:r>
           </a:p>
           <a:p>
@@ -5738,15 +5738,15 @@
                   <a:srgbClr val="2A2A2A"/>
                 </a:solidFill>
               </a:rPr>
-              <a:t>Caught 12,430 of 13,642 attacks</a:t>
-            </a:r>
-            <a:r>
-              <a:rPr sz="1500" b="0">
-                <a:solidFill>
-                  <a:srgbClr val="2A2A2A"/>
-                </a:solidFill>
-              </a:rPr>
-              <a:t> (91.1%)</a:t>
+              <a:t>Caught 18,231 of 18,982 attacks</a:t>
+            </a:r>
+            <a:r>
+              <a:rPr sz="1500" b="0">
+                <a:solidFill>
+                  <a:srgbClr val="2A2A2A"/>
+                </a:solidFill>
+              </a:rPr>
+              <a:t> (96.0%)</a:t>
             </a:r>
           </a:p>
           <a:p>
@@ -5769,15 +5769,15 @@
                   <a:srgbClr val="2A2A2A"/>
                 </a:solidFill>
               </a:rPr>
-              <a:t>Missed 1,212</a:t>
-            </a:r>
-            <a:r>
-              <a:rPr sz="1500" b="0">
-                <a:solidFill>
-                  <a:srgbClr val="2A2A2A"/>
-                </a:solidFill>
-              </a:rPr>
-              <a:t> (8.9%)</a:t>
+              <a:t>Missed 751</a:t>
+            </a:r>
+            <a:r>
+              <a:rPr sz="1500" b="0">
+                <a:solidFill>
+                  <a:srgbClr val="2A2A2A"/>
+                </a:solidFill>
+              </a:rPr>
+              <a:t> (4.0%)</a:t>
             </a:r>
           </a:p>
           <a:p>
@@ -5808,15 +5808,15 @@
                   <a:srgbClr val="2A2A2A"/>
                 </a:solidFill>
               </a:rPr>
-              <a:t>1,221 of 17,095 normal connections</a:t>
-            </a:r>
-            <a:r>
-              <a:rPr sz="1500" b="0">
-                <a:solidFill>
-                  <a:srgbClr val="2A2A2A"/>
-                </a:solidFill>
-              </a:rPr>
-              <a:t> for review (7.14%)</a:t>
+              <a:t>9,000 of 33,662 normal connections</a:t>
+            </a:r>
+            <a:r>
+              <a:rPr sz="1500" b="0">
+                <a:solidFill>
+                  <a:srgbClr val="2A2A2A"/>
+                </a:solidFill>
+              </a:rPr>
+              <a:t> for review (26.74%)</a:t>
             </a:r>
           </a:p>
           <a:p>
@@ -6391,7 +6391,7 @@
                   <a:srgbClr val="2A2A2A"/>
                 </a:solidFill>
               </a:rPr>
-              <a:t>At the recommended setting: 91% of attacks caught, 7.14% of normal traffic flagged</a:t>
+              <a:t>At the recommended setting: 96% of attacks caught, 26.74% of normal traffic flagged</a:t>
             </a:r>
           </a:p>
           <a:p>
@@ -6414,7 +6414,7 @@
                   <a:srgbClr val="2A2A2A"/>
                 </a:solidFill>
               </a:rPr>
-              <a:t>A tighter setting is available: it alerts on only 0.82% of normal traffic, at the cost of catching 77% of attacks instead of 91%</a:t>
+              <a:t>A tighter setting is available: it alerts on only 5.84% of normal traffic, at the cost of catching 83% of attacks instead of 96%</a:t>
             </a:r>
           </a:p>
           <a:p>
@@ -6445,7 +6445,7 @@
                   <a:srgbClr val="2A2A2A"/>
                 </a:solidFill>
               </a:rPr>
-              <a:t>714,240 items to review per day</a:t>
+              <a:t>2,673,640 items to review per day</a:t>
             </a:r>
             <a:r>
               <a:rPr sz="1500" b="0">
